--- a/templates/4EOS-Presentation-Template.pptx
+++ b/templates/4EOS-Presentation-Template.pptx
@@ -3299,7 +3299,7 @@
       </p:sp>
       <p:pic>
         <p:nvPicPr>
-          <p:cNvPr id="3" name="Picture 2" descr="4eos_logo.png"/>
+          <p:cNvPr id="3" name="Picture 2" descr="4eos_original_logo.png"/>
           <p:cNvPicPr>
             <a:picLocks noChangeAspect="1"/>
           </p:cNvPicPr>
